--- a/docs/reports/presentation/Slides_ProjectPitch.pptx
+++ b/docs/reports/presentation/Slides_ProjectPitch.pptx
@@ -237,7 +237,7 @@
           <a:p>
             <a:fld id="{316DE09A-C9B0-4C61-9A0B-A88EDE867B84}" type="datetimeFigureOut">
               <a:rPr lang="de-AT" smtClean="0"/>
-              <a:t>17.01.2026</a:t>
+              <a:t>23.01.2026</a:t>
             </a:fld>
             <a:endParaRPr lang="de-AT"/>
           </a:p>
@@ -549,6 +549,30 @@
           <a:bodyPr/>
           <a:lstStyle/>
           <a:p>
+            <a:r>
+              <a:rPr lang="en-US" dirty="0"/>
+              <a:t>We’re the Data Team from </a:t>
+            </a:r>
+            <a:r>
+              <a:rPr lang="en-US" dirty="0" err="1"/>
+              <a:t>Broadsoft</a:t>
+            </a:r>
+            <a:r>
+              <a:rPr lang="en-US" dirty="0"/>
+              <a:t> Consulting, and today we’ll be presenting a </a:t>
+            </a:r>
+            <a:r>
+              <a:rPr lang="en-US" b="1" dirty="0"/>
+              <a:t>temperature forecasting project</a:t>
+            </a:r>
+            <a:r>
+              <a:rPr lang="en-US" dirty="0"/>
+              <a:t> designed to support </a:t>
+            </a:r>
+            <a:r>
+              <a:rPr lang="en-US" b="1" dirty="0"/>
+              <a:t>energy consumption estimation and long-term planning</a:t>
+            </a:r>
             <a:endParaRPr lang="de-AT" dirty="0"/>
           </a:p>
         </p:txBody>
@@ -570,6 +594,567 @@
           <a:p>
             <a:fld id="{D4BE70A7-52C8-47CA-AC39-6F54992E1923}" type="slidenum">
               <a:rPr lang="de-AT" smtClean="0"/>
+              <a:t>1</a:t>
+            </a:fld>
+            <a:endParaRPr lang="de-AT"/>
+          </a:p>
+        </p:txBody>
+      </p:sp>
+    </p:spTree>
+    <p:extLst>
+      <p:ext uri="{BB962C8B-B14F-4D97-AF65-F5344CB8AC3E}">
+        <p14:creationId xmlns:p14="http://schemas.microsoft.com/office/powerpoint/2010/main" val="4194399061"/>
+      </p:ext>
+    </p:extLst>
+  </p:cSld>
+  <p:clrMapOvr>
+    <a:masterClrMapping/>
+  </p:clrMapOvr>
+</p:notes>
+</file>
+
+<file path=ppt/notesSlides/notesSlide2.xml><?xml version="1.0" encoding="utf-8"?>
+<p:notes xmlns:a="http://schemas.openxmlformats.org/drawingml/2006/main" xmlns:r="http://schemas.openxmlformats.org/officeDocument/2006/relationships" xmlns:p="http://schemas.openxmlformats.org/presentationml/2006/main">
+  <p:cSld>
+    <p:spTree>
+      <p:nvGrpSpPr>
+        <p:cNvPr id="1" name=""/>
+        <p:cNvGrpSpPr/>
+        <p:nvPr/>
+      </p:nvGrpSpPr>
+      <p:grpSpPr>
+        <a:xfrm>
+          <a:off x="0" y="0"/>
+          <a:ext cx="0" cy="0"/>
+          <a:chOff x="0" y="0"/>
+          <a:chExt cx="0" cy="0"/>
+        </a:xfrm>
+      </p:grpSpPr>
+      <p:sp>
+        <p:nvSpPr>
+          <p:cNvPr id="2" name="Folienbildplatzhalter 1"/>
+          <p:cNvSpPr>
+            <a:spLocks noGrp="1" noRot="1" noChangeAspect="1"/>
+          </p:cNvSpPr>
+          <p:nvPr>
+            <p:ph type="sldImg"/>
+          </p:nvPr>
+        </p:nvSpPr>
+        <p:spPr/>
+      </p:sp>
+      <p:sp>
+        <p:nvSpPr>
+          <p:cNvPr id="3" name="Notizenplatzhalter 2"/>
+          <p:cNvSpPr>
+            <a:spLocks noGrp="1"/>
+          </p:cNvSpPr>
+          <p:nvPr>
+            <p:ph type="body" idx="1"/>
+          </p:nvPr>
+        </p:nvSpPr>
+        <p:spPr/>
+        <p:txBody>
+          <a:bodyPr/>
+          <a:lstStyle/>
+          <a:p>
+            <a:r>
+              <a:rPr lang="en-US" dirty="0"/>
+              <a:t>the problem we’re addressing</a:t>
+            </a:r>
+          </a:p>
+          <a:p>
+            <a:endParaRPr lang="en-US" dirty="0"/>
+          </a:p>
+          <a:p>
+            <a:r>
+              <a:rPr lang="en-US" dirty="0"/>
+              <a:t>our data and modeling approach</a:t>
+            </a:r>
+          </a:p>
+          <a:p>
+            <a:endParaRPr lang="en-US" dirty="0"/>
+          </a:p>
+          <a:p>
+            <a:r>
+              <a:rPr lang="en-US" dirty="0"/>
+              <a:t>how we evaluated performance</a:t>
+            </a:r>
+          </a:p>
+          <a:p>
+            <a:endParaRPr lang="en-US" dirty="0"/>
+          </a:p>
+          <a:p>
+            <a:r>
+              <a:rPr lang="en-US" dirty="0"/>
+              <a:t>and most importantly, </a:t>
+            </a:r>
+            <a:r>
+              <a:rPr lang="en-US" b="1" dirty="0"/>
+              <a:t>why this forecast has real value</a:t>
+            </a:r>
+            <a:r>
+              <a:rPr lang="en-US" dirty="0"/>
+              <a:t>, even years into the future.</a:t>
+            </a:r>
+          </a:p>
+        </p:txBody>
+      </p:sp>
+      <p:sp>
+        <p:nvSpPr>
+          <p:cNvPr id="4" name="Foliennummernplatzhalter 3"/>
+          <p:cNvSpPr>
+            <a:spLocks noGrp="1"/>
+          </p:cNvSpPr>
+          <p:nvPr>
+            <p:ph type="sldNum" sz="quarter" idx="5"/>
+          </p:nvPr>
+        </p:nvSpPr>
+        <p:spPr/>
+        <p:txBody>
+          <a:bodyPr/>
+          <a:lstStyle/>
+          <a:p>
+            <a:fld id="{D4BE70A7-52C8-47CA-AC39-6F54992E1923}" type="slidenum">
+              <a:rPr lang="de-AT" smtClean="0"/>
+              <a:t>2</a:t>
+            </a:fld>
+            <a:endParaRPr lang="de-AT"/>
+          </a:p>
+        </p:txBody>
+      </p:sp>
+    </p:spTree>
+    <p:extLst>
+      <p:ext uri="{BB962C8B-B14F-4D97-AF65-F5344CB8AC3E}">
+        <p14:creationId xmlns:p14="http://schemas.microsoft.com/office/powerpoint/2010/main" val="2127735344"/>
+      </p:ext>
+    </p:extLst>
+  </p:cSld>
+  <p:clrMapOvr>
+    <a:masterClrMapping/>
+  </p:clrMapOvr>
+</p:notes>
+</file>
+
+<file path=ppt/notesSlides/notesSlide3.xml><?xml version="1.0" encoding="utf-8"?>
+<p:notes xmlns:a="http://schemas.openxmlformats.org/drawingml/2006/main" xmlns:r="http://schemas.openxmlformats.org/officeDocument/2006/relationships" xmlns:p="http://schemas.openxmlformats.org/presentationml/2006/main">
+  <p:cSld>
+    <p:spTree>
+      <p:nvGrpSpPr>
+        <p:cNvPr id="1" name=""/>
+        <p:cNvGrpSpPr/>
+        <p:nvPr/>
+      </p:nvGrpSpPr>
+      <p:grpSpPr>
+        <a:xfrm>
+          <a:off x="0" y="0"/>
+          <a:ext cx="0" cy="0"/>
+          <a:chOff x="0" y="0"/>
+          <a:chExt cx="0" cy="0"/>
+        </a:xfrm>
+      </p:grpSpPr>
+      <p:sp>
+        <p:nvSpPr>
+          <p:cNvPr id="2" name="Folienbildplatzhalter 1"/>
+          <p:cNvSpPr>
+            <a:spLocks noGrp="1" noRot="1" noChangeAspect="1"/>
+          </p:cNvSpPr>
+          <p:nvPr>
+            <p:ph type="sldImg"/>
+          </p:nvPr>
+        </p:nvSpPr>
+        <p:spPr/>
+      </p:sp>
+      <p:sp>
+        <p:nvSpPr>
+          <p:cNvPr id="3" name="Notizenplatzhalter 2"/>
+          <p:cNvSpPr>
+            <a:spLocks noGrp="1"/>
+          </p:cNvSpPr>
+          <p:nvPr>
+            <p:ph type="body" idx="1"/>
+          </p:nvPr>
+        </p:nvSpPr>
+        <p:spPr/>
+        <p:txBody>
+          <a:bodyPr/>
+          <a:lstStyle/>
+          <a:p>
+            <a:endParaRPr lang="de-AT" dirty="0"/>
+          </a:p>
+        </p:txBody>
+      </p:sp>
+      <p:sp>
+        <p:nvSpPr>
+          <p:cNvPr id="4" name="Foliennummernplatzhalter 3"/>
+          <p:cNvSpPr>
+            <a:spLocks noGrp="1"/>
+          </p:cNvSpPr>
+          <p:nvPr>
+            <p:ph type="sldNum" sz="quarter" idx="5"/>
+          </p:nvPr>
+        </p:nvSpPr>
+        <p:spPr/>
+        <p:txBody>
+          <a:bodyPr/>
+          <a:lstStyle/>
+          <a:p>
+            <a:fld id="{D4BE70A7-52C8-47CA-AC39-6F54992E1923}" type="slidenum">
+              <a:rPr lang="de-AT" smtClean="0"/>
+              <a:t>3</a:t>
+            </a:fld>
+            <a:endParaRPr lang="de-AT"/>
+          </a:p>
+        </p:txBody>
+      </p:sp>
+    </p:spTree>
+    <p:extLst>
+      <p:ext uri="{BB962C8B-B14F-4D97-AF65-F5344CB8AC3E}">
+        <p14:creationId xmlns:p14="http://schemas.microsoft.com/office/powerpoint/2010/main" val="473683770"/>
+      </p:ext>
+    </p:extLst>
+  </p:cSld>
+  <p:clrMapOvr>
+    <a:masterClrMapping/>
+  </p:clrMapOvr>
+</p:notes>
+</file>
+
+<file path=ppt/notesSlides/notesSlide4.xml><?xml version="1.0" encoding="utf-8"?>
+<p:notes xmlns:a="http://schemas.openxmlformats.org/drawingml/2006/main" xmlns:r="http://schemas.openxmlformats.org/officeDocument/2006/relationships" xmlns:p="http://schemas.openxmlformats.org/presentationml/2006/main">
+  <p:cSld>
+    <p:spTree>
+      <p:nvGrpSpPr>
+        <p:cNvPr id="1" name=""/>
+        <p:cNvGrpSpPr/>
+        <p:nvPr/>
+      </p:nvGrpSpPr>
+      <p:grpSpPr>
+        <a:xfrm>
+          <a:off x="0" y="0"/>
+          <a:ext cx="0" cy="0"/>
+          <a:chOff x="0" y="0"/>
+          <a:chExt cx="0" cy="0"/>
+        </a:xfrm>
+      </p:grpSpPr>
+      <p:sp>
+        <p:nvSpPr>
+          <p:cNvPr id="2" name="Folienbildplatzhalter 1"/>
+          <p:cNvSpPr>
+            <a:spLocks noGrp="1" noRot="1" noChangeAspect="1"/>
+          </p:cNvSpPr>
+          <p:nvPr>
+            <p:ph type="sldImg"/>
+          </p:nvPr>
+        </p:nvSpPr>
+        <p:spPr/>
+      </p:sp>
+      <p:sp>
+        <p:nvSpPr>
+          <p:cNvPr id="3" name="Notizenplatzhalter 2"/>
+          <p:cNvSpPr>
+            <a:spLocks noGrp="1"/>
+          </p:cNvSpPr>
+          <p:nvPr>
+            <p:ph type="body" idx="1"/>
+          </p:nvPr>
+        </p:nvSpPr>
+        <p:spPr/>
+        <p:txBody>
+          <a:bodyPr/>
+          <a:lstStyle/>
+          <a:p>
+            <a:r>
+              <a:rPr lang="en-US" dirty="0"/>
+              <a:t>Energy demand is directly influenced by temperature — heating, cooling, and infrastructure planning all depend on it.</a:t>
+            </a:r>
+          </a:p>
+          <a:p>
+            <a:r>
+              <a:rPr lang="en-US" dirty="0"/>
+              <a:t>Current forecasting methods are often:</a:t>
+            </a:r>
+          </a:p>
+          <a:p>
+            <a:r>
+              <a:rPr lang="en-US" dirty="0"/>
+              <a:t>short-term focused</a:t>
+            </a:r>
+          </a:p>
+          <a:p>
+            <a:r>
+              <a:rPr lang="en-US" dirty="0"/>
+              <a:t>expensive to run</a:t>
+            </a:r>
+          </a:p>
+          <a:p>
+            <a:r>
+              <a:rPr lang="en-US" dirty="0"/>
+              <a:t>or difficult to adapt to localized conditions.</a:t>
+            </a:r>
+          </a:p>
+          <a:p>
+            <a:r>
+              <a:rPr lang="en-US" dirty="0"/>
+              <a:t>Our challenge was to create a </a:t>
+            </a:r>
+            <a:r>
+              <a:rPr lang="en-US" b="1" dirty="0"/>
+              <a:t>robust temperature prediction system</a:t>
+            </a:r>
+            <a:r>
+              <a:rPr lang="en-US" dirty="0"/>
+              <a:t> that:</a:t>
+            </a:r>
+          </a:p>
+          <a:p>
+            <a:r>
+              <a:rPr lang="en-US" dirty="0"/>
+              <a:t>works with historical daily data</a:t>
+            </a:r>
+          </a:p>
+          <a:p>
+            <a:r>
+              <a:rPr lang="en-US" dirty="0"/>
+              <a:t>captures seasonality and long-term trends</a:t>
+            </a:r>
+          </a:p>
+          <a:p>
+            <a:r>
+              <a:rPr lang="en-US" dirty="0"/>
+              <a:t>and provides accuracy that is </a:t>
+            </a:r>
+            <a:r>
+              <a:rPr lang="en-US" i="1" dirty="0"/>
+              <a:t>good enough to support real decisions</a:t>
+            </a:r>
+            <a:r>
+              <a:rPr lang="en-US" dirty="0"/>
+              <a:t>, not just theoretical benchmarks</a:t>
+            </a:r>
+          </a:p>
+          <a:p>
+            <a:endParaRPr lang="de-AT" dirty="0"/>
+          </a:p>
+        </p:txBody>
+      </p:sp>
+      <p:sp>
+        <p:nvSpPr>
+          <p:cNvPr id="4" name="Foliennummernplatzhalter 3"/>
+          <p:cNvSpPr>
+            <a:spLocks noGrp="1"/>
+          </p:cNvSpPr>
+          <p:nvPr>
+            <p:ph type="sldNum" sz="quarter" idx="5"/>
+          </p:nvPr>
+        </p:nvSpPr>
+        <p:spPr/>
+        <p:txBody>
+          <a:bodyPr/>
+          <a:lstStyle/>
+          <a:p>
+            <a:fld id="{D4BE70A7-52C8-47CA-AC39-6F54992E1923}" type="slidenum">
+              <a:rPr lang="de-AT" smtClean="0"/>
+              <a:t>4</a:t>
+            </a:fld>
+            <a:endParaRPr lang="de-AT"/>
+          </a:p>
+        </p:txBody>
+      </p:sp>
+    </p:spTree>
+    <p:extLst>
+      <p:ext uri="{BB962C8B-B14F-4D97-AF65-F5344CB8AC3E}">
+        <p14:creationId xmlns:p14="http://schemas.microsoft.com/office/powerpoint/2010/main" val="706391148"/>
+      </p:ext>
+    </p:extLst>
+  </p:cSld>
+  <p:clrMapOvr>
+    <a:masterClrMapping/>
+  </p:clrMapOvr>
+</p:notes>
+</file>
+
+<file path=ppt/notesSlides/notesSlide5.xml><?xml version="1.0" encoding="utf-8"?>
+<p:notes xmlns:a="http://schemas.openxmlformats.org/drawingml/2006/main" xmlns:r="http://schemas.openxmlformats.org/officeDocument/2006/relationships" xmlns:p="http://schemas.openxmlformats.org/presentationml/2006/main">
+  <p:cSld>
+    <p:spTree>
+      <p:nvGrpSpPr>
+        <p:cNvPr id="1" name=""/>
+        <p:cNvGrpSpPr/>
+        <p:nvPr/>
+      </p:nvGrpSpPr>
+      <p:grpSpPr>
+        <a:xfrm>
+          <a:off x="0" y="0"/>
+          <a:ext cx="0" cy="0"/>
+          <a:chOff x="0" y="0"/>
+          <a:chExt cx="0" cy="0"/>
+        </a:xfrm>
+      </p:grpSpPr>
+      <p:sp>
+        <p:nvSpPr>
+          <p:cNvPr id="2" name="Folienbildplatzhalter 1"/>
+          <p:cNvSpPr>
+            <a:spLocks noGrp="1" noRot="1" noChangeAspect="1"/>
+          </p:cNvSpPr>
+          <p:nvPr>
+            <p:ph type="sldImg"/>
+          </p:nvPr>
+        </p:nvSpPr>
+        <p:spPr/>
+      </p:sp>
+      <p:sp>
+        <p:nvSpPr>
+          <p:cNvPr id="3" name="Notizenplatzhalter 2"/>
+          <p:cNvSpPr>
+            <a:spLocks noGrp="1"/>
+          </p:cNvSpPr>
+          <p:nvPr>
+            <p:ph type="body" idx="1"/>
+          </p:nvPr>
+        </p:nvSpPr>
+        <p:spPr/>
+        <p:txBody>
+          <a:bodyPr/>
+          <a:lstStyle/>
+          <a:p>
+            <a:r>
+              <a:rPr lang="en-US" dirty="0"/>
+              <a:t>Our solution is a </a:t>
+            </a:r>
+            <a:r>
+              <a:rPr lang="en-US" b="1" dirty="0"/>
+              <a:t>data-driven temperature forecasting pipeline</a:t>
+            </a:r>
+            <a:r>
+              <a:rPr lang="en-US" dirty="0"/>
+              <a:t>.</a:t>
+            </a:r>
+          </a:p>
+          <a:p>
+            <a:r>
+              <a:rPr lang="en-US" dirty="0"/>
+              <a:t>The final model achieves a </a:t>
+            </a:r>
+            <a:r>
+              <a:rPr lang="en-US" b="1" dirty="0"/>
+              <a:t>mean absolute error of about 3°C</a:t>
+            </a:r>
+            <a:r>
+              <a:rPr lang="en-US" dirty="0"/>
+              <a:t>, evaluated over a </a:t>
+            </a:r>
+            <a:r>
+              <a:rPr lang="en-US" b="1" dirty="0"/>
+              <a:t>five-year prediction span</a:t>
+            </a:r>
+            <a:r>
+              <a:rPr lang="en-US" dirty="0"/>
+              <a:t>.</a:t>
+            </a:r>
+          </a:p>
+        </p:txBody>
+      </p:sp>
+      <p:sp>
+        <p:nvSpPr>
+          <p:cNvPr id="4" name="Foliennummernplatzhalter 3"/>
+          <p:cNvSpPr>
+            <a:spLocks noGrp="1"/>
+          </p:cNvSpPr>
+          <p:nvPr>
+            <p:ph type="sldNum" sz="quarter" idx="5"/>
+          </p:nvPr>
+        </p:nvSpPr>
+        <p:spPr/>
+        <p:txBody>
+          <a:bodyPr/>
+          <a:lstStyle/>
+          <a:p>
+            <a:fld id="{D4BE70A7-52C8-47CA-AC39-6F54992E1923}" type="slidenum">
+              <a:rPr lang="de-AT" smtClean="0"/>
+              <a:t>5</a:t>
+            </a:fld>
+            <a:endParaRPr lang="de-AT"/>
+          </a:p>
+        </p:txBody>
+      </p:sp>
+    </p:spTree>
+    <p:extLst>
+      <p:ext uri="{BB962C8B-B14F-4D97-AF65-F5344CB8AC3E}">
+        <p14:creationId xmlns:p14="http://schemas.microsoft.com/office/powerpoint/2010/main" val="205888919"/>
+      </p:ext>
+    </p:extLst>
+  </p:cSld>
+  <p:clrMapOvr>
+    <a:masterClrMapping/>
+  </p:clrMapOvr>
+</p:notes>
+</file>
+
+<file path=ppt/notesSlides/notesSlide6.xml><?xml version="1.0" encoding="utf-8"?>
+<p:notes xmlns:a="http://schemas.openxmlformats.org/drawingml/2006/main" xmlns:r="http://schemas.openxmlformats.org/officeDocument/2006/relationships" xmlns:p="http://schemas.openxmlformats.org/presentationml/2006/main">
+  <p:cSld>
+    <p:spTree>
+      <p:nvGrpSpPr>
+        <p:cNvPr id="1" name=""/>
+        <p:cNvGrpSpPr/>
+        <p:nvPr/>
+      </p:nvGrpSpPr>
+      <p:grpSpPr>
+        <a:xfrm>
+          <a:off x="0" y="0"/>
+          <a:ext cx="0" cy="0"/>
+          <a:chOff x="0" y="0"/>
+          <a:chExt cx="0" cy="0"/>
+        </a:xfrm>
+      </p:grpSpPr>
+      <p:sp>
+        <p:nvSpPr>
+          <p:cNvPr id="2" name="Folienbildplatzhalter 1"/>
+          <p:cNvSpPr>
+            <a:spLocks noGrp="1" noRot="1" noChangeAspect="1"/>
+          </p:cNvSpPr>
+          <p:nvPr>
+            <p:ph type="sldImg"/>
+          </p:nvPr>
+        </p:nvSpPr>
+        <p:spPr/>
+      </p:sp>
+      <p:sp>
+        <p:nvSpPr>
+          <p:cNvPr id="3" name="Notizenplatzhalter 2"/>
+          <p:cNvSpPr>
+            <a:spLocks noGrp="1"/>
+          </p:cNvSpPr>
+          <p:nvPr>
+            <p:ph type="body" idx="1"/>
+          </p:nvPr>
+        </p:nvSpPr>
+        <p:spPr/>
+        <p:txBody>
+          <a:bodyPr/>
+          <a:lstStyle/>
+          <a:p>
+            <a:endParaRPr lang="de-AT" dirty="0"/>
+          </a:p>
+        </p:txBody>
+      </p:sp>
+      <p:sp>
+        <p:nvSpPr>
+          <p:cNvPr id="4" name="Foliennummernplatzhalter 3"/>
+          <p:cNvSpPr>
+            <a:spLocks noGrp="1"/>
+          </p:cNvSpPr>
+          <p:nvPr>
+            <p:ph type="sldNum" sz="quarter" idx="5"/>
+          </p:nvPr>
+        </p:nvSpPr>
+        <p:spPr/>
+        <p:txBody>
+          <a:bodyPr/>
+          <a:lstStyle/>
+          <a:p>
+            <a:fld id="{D4BE70A7-52C8-47CA-AC39-6F54992E1923}" type="slidenum">
+              <a:rPr lang="de-AT" smtClean="0"/>
               <a:t>9</a:t>
             </a:fld>
             <a:endParaRPr lang="de-AT"/>
@@ -580,6 +1165,139 @@
     <p:extLst>
       <p:ext uri="{BB962C8B-B14F-4D97-AF65-F5344CB8AC3E}">
         <p14:creationId xmlns:p14="http://schemas.microsoft.com/office/powerpoint/2010/main" val="2356024705"/>
+      </p:ext>
+    </p:extLst>
+  </p:cSld>
+  <p:clrMapOvr>
+    <a:masterClrMapping/>
+  </p:clrMapOvr>
+</p:notes>
+</file>
+
+<file path=ppt/notesSlides/notesSlide7.xml><?xml version="1.0" encoding="utf-8"?>
+<p:notes xmlns:a="http://schemas.openxmlformats.org/drawingml/2006/main" xmlns:r="http://schemas.openxmlformats.org/officeDocument/2006/relationships" xmlns:p="http://schemas.openxmlformats.org/presentationml/2006/main">
+  <p:cSld>
+    <p:spTree>
+      <p:nvGrpSpPr>
+        <p:cNvPr id="1" name=""/>
+        <p:cNvGrpSpPr/>
+        <p:nvPr/>
+      </p:nvGrpSpPr>
+      <p:grpSpPr>
+        <a:xfrm>
+          <a:off x="0" y="0"/>
+          <a:ext cx="0" cy="0"/>
+          <a:chOff x="0" y="0"/>
+          <a:chExt cx="0" cy="0"/>
+        </a:xfrm>
+      </p:grpSpPr>
+      <p:sp>
+        <p:nvSpPr>
+          <p:cNvPr id="2" name="Folienbildplatzhalter 1"/>
+          <p:cNvSpPr>
+            <a:spLocks noGrp="1" noRot="1" noChangeAspect="1"/>
+          </p:cNvSpPr>
+          <p:nvPr>
+            <p:ph type="sldImg"/>
+          </p:nvPr>
+        </p:nvSpPr>
+        <p:spPr/>
+      </p:sp>
+      <p:sp>
+        <p:nvSpPr>
+          <p:cNvPr id="3" name="Notizenplatzhalter 2"/>
+          <p:cNvSpPr>
+            <a:spLocks noGrp="1"/>
+          </p:cNvSpPr>
+          <p:nvPr>
+            <p:ph type="body" idx="1"/>
+          </p:nvPr>
+        </p:nvSpPr>
+        <p:spPr/>
+        <p:txBody>
+          <a:bodyPr/>
+          <a:lstStyle/>
+          <a:p>
+            <a:r>
+              <a:rPr lang="en-US" dirty="0"/>
+              <a:t>This model enables </a:t>
+            </a:r>
+            <a:r>
+              <a:rPr lang="en-US" b="1" dirty="0"/>
+              <a:t>more reliable energy demand estimation</a:t>
+            </a:r>
+            <a:r>
+              <a:rPr lang="en-US" dirty="0"/>
+              <a:t>, especially for long-term planning.</a:t>
+            </a:r>
+          </a:p>
+          <a:p>
+            <a:r>
+              <a:rPr lang="en-US" dirty="0"/>
+              <a:t>Potential applications include:</a:t>
+            </a:r>
+          </a:p>
+          <a:p>
+            <a:r>
+              <a:rPr lang="en-US" dirty="0"/>
+              <a:t>energy load forecasting</a:t>
+            </a:r>
+          </a:p>
+          <a:p>
+            <a:r>
+              <a:rPr lang="en-US" dirty="0"/>
+              <a:t>infrastructure stress planning</a:t>
+            </a:r>
+          </a:p>
+          <a:p>
+            <a:r>
+              <a:rPr lang="en-US" dirty="0"/>
+              <a:t>and even consumer-facing weather intelligence tools</a:t>
+            </a:r>
+          </a:p>
+          <a:p>
+            <a:r>
+              <a:rPr lang="en-US" dirty="0"/>
+              <a:t>The framework is also designed to </a:t>
+            </a:r>
+            <a:r>
+              <a:rPr lang="en-US" b="1" dirty="0"/>
+              <a:t>improve continuously</a:t>
+            </a:r>
+            <a:r>
+              <a:rPr lang="en-US" dirty="0"/>
+              <a:t> as new data becomes available.</a:t>
+            </a:r>
+          </a:p>
+        </p:txBody>
+      </p:sp>
+      <p:sp>
+        <p:nvSpPr>
+          <p:cNvPr id="4" name="Foliennummernplatzhalter 3"/>
+          <p:cNvSpPr>
+            <a:spLocks noGrp="1"/>
+          </p:cNvSpPr>
+          <p:nvPr>
+            <p:ph type="sldNum" sz="quarter" idx="5"/>
+          </p:nvPr>
+        </p:nvSpPr>
+        <p:spPr/>
+        <p:txBody>
+          <a:bodyPr/>
+          <a:lstStyle/>
+          <a:p>
+            <a:fld id="{D4BE70A7-52C8-47CA-AC39-6F54992E1923}" type="slidenum">
+              <a:rPr lang="de-AT" smtClean="0"/>
+              <a:t>15</a:t>
+            </a:fld>
+            <a:endParaRPr lang="de-AT"/>
+          </a:p>
+        </p:txBody>
+      </p:sp>
+    </p:spTree>
+    <p:extLst>
+      <p:ext uri="{BB962C8B-B14F-4D97-AF65-F5344CB8AC3E}">
+        <p14:creationId xmlns:p14="http://schemas.microsoft.com/office/powerpoint/2010/main" val="3417872752"/>
       </p:ext>
     </p:extLst>
   </p:cSld>
@@ -769,7 +1487,7 @@
             <a:fld id="{1D8BD707-D9CF-40AE-B4C6-C98DA3205C09}" type="datetimeFigureOut">
               <a:rPr lang="en-US" smtClean="0"/>
               <a:pPr/>
-              <a:t>1/16/2026</a:t>
+              <a:t>1/23/2026</a:t>
             </a:fld>
             <a:endParaRPr lang="en-US"/>
           </a:p>
@@ -934,7 +1652,7 @@
             <a:fld id="{1D8BD707-D9CF-40AE-B4C6-C98DA3205C09}" type="datetimeFigureOut">
               <a:rPr lang="en-US" smtClean="0"/>
               <a:pPr/>
-              <a:t>1/16/2026</a:t>
+              <a:t>1/23/2026</a:t>
             </a:fld>
             <a:endParaRPr lang="en-US"/>
           </a:p>
@@ -1109,7 +1827,7 @@
             <a:fld id="{1D8BD707-D9CF-40AE-B4C6-C98DA3205C09}" type="datetimeFigureOut">
               <a:rPr lang="en-US" smtClean="0"/>
               <a:pPr/>
-              <a:t>1/16/2026</a:t>
+              <a:t>1/23/2026</a:t>
             </a:fld>
             <a:endParaRPr lang="en-US"/>
           </a:p>
@@ -1274,7 +1992,7 @@
             <a:fld id="{1D8BD707-D9CF-40AE-B4C6-C98DA3205C09}" type="datetimeFigureOut">
               <a:rPr lang="en-US" smtClean="0"/>
               <a:pPr/>
-              <a:t>1/16/2026</a:t>
+              <a:t>1/23/2026</a:t>
             </a:fld>
             <a:endParaRPr lang="en-US"/>
           </a:p>
@@ -1516,7 +2234,7 @@
             <a:fld id="{1D8BD707-D9CF-40AE-B4C6-C98DA3205C09}" type="datetimeFigureOut">
               <a:rPr lang="en-US" smtClean="0"/>
               <a:pPr/>
-              <a:t>1/16/2026</a:t>
+              <a:t>1/23/2026</a:t>
             </a:fld>
             <a:endParaRPr lang="en-US"/>
           </a:p>
@@ -1798,7 +2516,7 @@
             <a:fld id="{1D8BD707-D9CF-40AE-B4C6-C98DA3205C09}" type="datetimeFigureOut">
               <a:rPr lang="en-US" smtClean="0"/>
               <a:pPr/>
-              <a:t>1/16/2026</a:t>
+              <a:t>1/23/2026</a:t>
             </a:fld>
             <a:endParaRPr lang="en-US"/>
           </a:p>
@@ -2214,7 +2932,7 @@
             <a:fld id="{1D8BD707-D9CF-40AE-B4C6-C98DA3205C09}" type="datetimeFigureOut">
               <a:rPr lang="en-US" smtClean="0"/>
               <a:pPr/>
-              <a:t>1/16/2026</a:t>
+              <a:t>1/23/2026</a:t>
             </a:fld>
             <a:endParaRPr lang="en-US"/>
           </a:p>
@@ -2328,7 +3046,7 @@
             <a:fld id="{1D8BD707-D9CF-40AE-B4C6-C98DA3205C09}" type="datetimeFigureOut">
               <a:rPr lang="en-US" smtClean="0"/>
               <a:pPr/>
-              <a:t>1/16/2026</a:t>
+              <a:t>1/23/2026</a:t>
             </a:fld>
             <a:endParaRPr lang="en-US"/>
           </a:p>
@@ -2420,7 +3138,7 @@
             <a:fld id="{1D8BD707-D9CF-40AE-B4C6-C98DA3205C09}" type="datetimeFigureOut">
               <a:rPr lang="en-US" smtClean="0"/>
               <a:pPr/>
-              <a:t>1/16/2026</a:t>
+              <a:t>1/23/2026</a:t>
             </a:fld>
             <a:endParaRPr lang="en-US"/>
           </a:p>
@@ -2692,7 +3410,7 @@
             <a:fld id="{1D8BD707-D9CF-40AE-B4C6-C98DA3205C09}" type="datetimeFigureOut">
               <a:rPr lang="en-US" smtClean="0"/>
               <a:pPr/>
-              <a:t>1/16/2026</a:t>
+              <a:t>1/23/2026</a:t>
             </a:fld>
             <a:endParaRPr lang="en-US"/>
           </a:p>
@@ -2941,7 +3659,7 @@
             <a:fld id="{1D8BD707-D9CF-40AE-B4C6-C98DA3205C09}" type="datetimeFigureOut">
               <a:rPr lang="en-US" smtClean="0"/>
               <a:pPr/>
-              <a:t>1/16/2026</a:t>
+              <a:t>1/23/2026</a:t>
             </a:fld>
             <a:endParaRPr lang="en-US"/>
           </a:p>
@@ -3149,7 +3867,7 @@
             <a:fld id="{1D8BD707-D9CF-40AE-B4C6-C98DA3205C09}" type="datetimeFigureOut">
               <a:rPr lang="en-US" smtClean="0"/>
               <a:pPr/>
-              <a:t>1/16/2026</a:t>
+              <a:t>1/23/2026</a:t>
             </a:fld>
             <a:endParaRPr lang="en-US"/>
           </a:p>
@@ -3581,7 +4299,7 @@
               </a:pathLst>
             </a:custGeom>
             <a:blipFill>
-              <a:blip r:embed="rId2">
+              <a:blip r:embed="rId3">
                 <a:alphaModFix amt="35000"/>
               </a:blip>
               <a:stretch>
@@ -3828,10 +4546,10 @@
             </a:pathLst>
           </a:custGeom>
           <a:blipFill>
-            <a:blip r:embed="rId3">
+            <a:blip r:embed="rId4">
               <a:extLst>
                 <a:ext uri="{96DAC541-7B7A-43D3-8B79-37D633B846F1}">
-                  <asvg:svgBlip xmlns:asvg="http://schemas.microsoft.com/office/drawing/2016/SVG/main" r:embed="rId4"/>
+                  <asvg:svgBlip xmlns:asvg="http://schemas.microsoft.com/office/drawing/2016/SVG/main" r:embed="rId5"/>
                 </a:ext>
               </a:extLst>
             </a:blip>
@@ -3945,7 +4663,17 @@
               </a:rPr>
               <a:t>Weather forecasting </a:t>
             </a:r>
-            <a:br>
+          </a:p>
+          <a:p>
+            <a:pPr algn="ctr">
+              <a:lnSpc>
+                <a:spcPts val="7419"/>
+              </a:lnSpc>
+              <a:spcBef>
+                <a:spcPct val="0"/>
+              </a:spcBef>
+            </a:pPr>
+            <a:r>
               <a:rPr lang="en-US" sz="5299" dirty="0">
                 <a:solidFill>
                   <a:srgbClr val="FFFFFF"/>
@@ -3955,9 +4683,10 @@
                 <a:cs typeface="League Spartan"/>
                 <a:sym typeface="League Spartan"/>
               </a:rPr>
-            </a:br>
-            <a:r>
-              <a:rPr lang="en-US" sz="5299" dirty="0">
+              <a:t>for various </a:t>
+            </a:r>
+            <a:r>
+              <a:rPr lang="en-US" sz="5299" dirty="0" err="1">
                 <a:solidFill>
                   <a:srgbClr val="FFFFFF"/>
                 </a:solidFill>
@@ -3966,8 +4695,17 @@
                 <a:cs typeface="League Spartan"/>
                 <a:sym typeface="League Spartan"/>
               </a:rPr>
-              <a:t>to boost sales</a:t>
-            </a:r>
+              <a:t>usecases</a:t>
+            </a:r>
+            <a:endParaRPr lang="en-US" sz="5299" dirty="0">
+              <a:solidFill>
+                <a:srgbClr val="FFFFFF"/>
+              </a:solidFill>
+              <a:latin typeface="League Spartan"/>
+              <a:ea typeface="League Spartan"/>
+              <a:cs typeface="League Spartan"/>
+              <a:sym typeface="League Spartan"/>
+            </a:endParaRPr>
           </a:p>
         </p:txBody>
       </p:sp>
@@ -4133,11 +4871,11 @@
           <p:nvPr/>
         </p:nvPicPr>
         <p:blipFill>
-          <a:blip r:embed="rId5" cstate="print">
+          <a:blip r:embed="rId6" cstate="print">
             <a:extLst>
               <a:ext uri="{BEBA8EAE-BF5A-486C-A8C5-ECC9F3942E4B}">
                 <a14:imgProps xmlns:a14="http://schemas.microsoft.com/office/drawing/2010/main">
-                  <a14:imgLayer r:embed="rId6">
+                  <a14:imgLayer r:embed="rId7">
                     <a14:imgEffect>
                       <a14:backgroundRemoval t="8105" b="90820" l="9961" r="89844">
                         <a14:foregroundMark x1="40820" y1="28711" x2="40820" y2="28711"/>
@@ -4259,13 +4997,13 @@
   <p:clrMapOvr>
     <a:masterClrMapping/>
   </p:clrMapOvr>
-  <mc:AlternateContent xmlns:mc="http://schemas.openxmlformats.org/markup-compatibility/2006">
-    <mc:Choice xmlns:p14="http://schemas.microsoft.com/office/powerpoint/2010/main" Requires="p14">
+  <mc:AlternateContent xmlns:mc="http://schemas.openxmlformats.org/markup-compatibility/2006" xmlns:p14="http://schemas.microsoft.com/office/powerpoint/2010/main">
+    <mc:Choice Requires="p14">
       <p:transition spd="slow" p14:dur="800">
         <p:circle/>
       </p:transition>
     </mc:Choice>
-    <mc:Fallback>
+    <mc:Fallback xmlns="">
       <p:transition spd="slow">
         <p:circle/>
       </p:transition>
@@ -8842,10 +9580,10 @@
             </a:pathLst>
           </a:custGeom>
           <a:blipFill>
-            <a:blip r:embed="rId2">
+            <a:blip r:embed="rId3">
               <a:extLst>
                 <a:ext uri="{96DAC541-7B7A-43D3-8B79-37D633B846F1}">
-                  <asvg:svgBlip xmlns:asvg="http://schemas.microsoft.com/office/drawing/2016/SVG/main" r:embed="rId3"/>
+                  <asvg:svgBlip xmlns:asvg="http://schemas.microsoft.com/office/drawing/2016/SVG/main" r:embed="rId4"/>
                 </a:ext>
               </a:extLst>
             </a:blip>
@@ -9374,11 +10112,11 @@
           <p:nvPr/>
         </p:nvPicPr>
         <p:blipFill>
-          <a:blip r:embed="rId4">
+          <a:blip r:embed="rId5">
             <a:extLst>
               <a:ext uri="{BEBA8EAE-BF5A-486C-A8C5-ECC9F3942E4B}">
                 <a14:imgProps xmlns:a14="http://schemas.microsoft.com/office/drawing/2010/main">
-                  <a14:imgLayer r:embed="rId5">
+                  <a14:imgLayer r:embed="rId6">
                     <a14:imgEffect>
                       <a14:backgroundRemoval t="8105" b="90820" l="9961" r="89844">
                         <a14:foregroundMark x1="40820" y1="28711" x2="40820" y2="28711"/>
@@ -10381,7 +11119,7 @@
               </a:pathLst>
             </a:custGeom>
             <a:blipFill>
-              <a:blip r:embed="rId2"/>
+              <a:blip r:embed="rId3"/>
               <a:stretch>
                 <a:fillRect l="-25046" r="-25046"/>
               </a:stretch>
@@ -10990,10 +11728,10 @@
             </a:pathLst>
           </a:custGeom>
           <a:blipFill>
-            <a:blip r:embed="rId3">
+            <a:blip r:embed="rId4">
               <a:extLst>
                 <a:ext uri="{96DAC541-7B7A-43D3-8B79-37D633B846F1}">
-                  <asvg:svgBlip xmlns:asvg="http://schemas.microsoft.com/office/drawing/2016/SVG/main" r:embed="rId4"/>
+                  <asvg:svgBlip xmlns:asvg="http://schemas.microsoft.com/office/drawing/2016/SVG/main" r:embed="rId5"/>
                 </a:ext>
               </a:extLst>
             </a:blip>
@@ -11025,11 +11763,11 @@
           <p:nvPr/>
         </p:nvPicPr>
         <p:blipFill>
-          <a:blip r:embed="rId5" cstate="print">
+          <a:blip r:embed="rId6" cstate="print">
             <a:extLst>
               <a:ext uri="{BEBA8EAE-BF5A-486C-A8C5-ECC9F3942E4B}">
                 <a14:imgProps xmlns:a14="http://schemas.microsoft.com/office/drawing/2010/main">
-                  <a14:imgLayer r:embed="rId6">
+                  <a14:imgLayer r:embed="rId7">
                     <a14:imgEffect>
                       <a14:backgroundRemoval t="8105" b="90820" l="9961" r="89844">
                         <a14:foregroundMark x1="40820" y1="28711" x2="40820" y2="28711"/>
@@ -11192,12 +11930,12 @@
           <p:nvPr/>
         </p:nvPicPr>
         <p:blipFill>
-          <a:blip r:embed="rId2" cstate="print">
+          <a:blip r:embed="rId3" cstate="print">
             <a:alphaModFix amt="20000"/>
             <a:extLst>
               <a:ext uri="{BEBA8EAE-BF5A-486C-A8C5-ECC9F3942E4B}">
                 <a14:imgProps xmlns:a14="http://schemas.microsoft.com/office/drawing/2010/main">
-                  <a14:imgLayer r:embed="rId3">
+                  <a14:imgLayer r:embed="rId4">
                     <a14:imgEffect>
                       <a14:backgroundRemoval t="8105" b="90820" l="9961" r="89844">
                         <a14:foregroundMark x1="40820" y1="28711" x2="40820" y2="28711"/>
@@ -13709,10 +14447,10 @@
             </a:pathLst>
           </a:custGeom>
           <a:blipFill>
-            <a:blip r:embed="rId2">
+            <a:blip r:embed="rId3">
               <a:extLst>
                 <a:ext uri="{96DAC541-7B7A-43D3-8B79-37D633B846F1}">
-                  <asvg:svgBlip xmlns:asvg="http://schemas.microsoft.com/office/drawing/2016/SVG/main" r:embed="rId3"/>
+                  <asvg:svgBlip xmlns:asvg="http://schemas.microsoft.com/office/drawing/2016/SVG/main" r:embed="rId4"/>
                 </a:ext>
               </a:extLst>
             </a:blip>
@@ -13744,12 +14482,12 @@
           <p:nvPr/>
         </p:nvPicPr>
         <p:blipFill>
-          <a:blip r:embed="rId4" cstate="print">
+          <a:blip r:embed="rId5" cstate="print">
             <a:alphaModFix amt="20000"/>
             <a:extLst>
               <a:ext uri="{BEBA8EAE-BF5A-486C-A8C5-ECC9F3942E4B}">
                 <a14:imgProps xmlns:a14="http://schemas.microsoft.com/office/drawing/2010/main">
-                  <a14:imgLayer r:embed="rId5">
+                  <a14:imgLayer r:embed="rId6">
                     <a14:imgEffect>
                       <a14:backgroundRemoval t="8105" b="90820" l="9961" r="89844">
                         <a14:foregroundMark x1="40820" y1="28711" x2="40820" y2="28711"/>
@@ -14751,10 +15489,10 @@
             </a:pathLst>
           </a:custGeom>
           <a:blipFill>
-            <a:blip r:embed="rId2">
+            <a:blip r:embed="rId3">
               <a:extLst>
                 <a:ext uri="{96DAC541-7B7A-43D3-8B79-37D633B846F1}">
-                  <asvg:svgBlip xmlns:asvg="http://schemas.microsoft.com/office/drawing/2016/SVG/main" r:embed="rId3"/>
+                  <asvg:svgBlip xmlns:asvg="http://schemas.microsoft.com/office/drawing/2016/SVG/main" r:embed="rId4"/>
                 </a:ext>
               </a:extLst>
             </a:blip>
@@ -14786,12 +15524,12 @@
           <p:nvPr/>
         </p:nvPicPr>
         <p:blipFill>
-          <a:blip r:embed="rId4" cstate="print">
+          <a:blip r:embed="rId5" cstate="print">
             <a:alphaModFix amt="20000"/>
             <a:extLst>
               <a:ext uri="{BEBA8EAE-BF5A-486C-A8C5-ECC9F3942E4B}">
                 <a14:imgProps xmlns:a14="http://schemas.microsoft.com/office/drawing/2010/main">
-                  <a14:imgLayer r:embed="rId5">
+                  <a14:imgLayer r:embed="rId6">
                     <a14:imgEffect>
                       <a14:backgroundRemoval t="8105" b="90820" l="9961" r="89844">
                         <a14:foregroundMark x1="40820" y1="28711" x2="40820" y2="28711"/>
@@ -19282,7 +20020,7 @@
               <a:buChar char="•"/>
             </a:pPr>
             <a:r>
-              <a:rPr lang="en-US" sz="2400" b="1" dirty="0">
+              <a:rPr lang="en-US" sz="2400" b="1" u="sng" dirty="0">
                 <a:solidFill>
                   <a:srgbClr val="000000"/>
                 </a:solidFill>
@@ -19652,7 +20390,7 @@
               <a:buChar char="•"/>
             </a:pPr>
             <a:r>
-              <a:rPr lang="en-US" sz="2400" b="1" dirty="0">
+              <a:rPr lang="en-US" sz="2400" b="1" u="sng" dirty="0">
                 <a:solidFill>
                   <a:srgbClr val="000000"/>
                 </a:solidFill>
@@ -20752,7 +21490,7 @@
               <a:buChar char="•"/>
             </a:pPr>
             <a:r>
-              <a:rPr lang="en-US" sz="2400" b="1" dirty="0">
+              <a:rPr lang="en-US" sz="2400" b="1" u="sng" dirty="0">
                 <a:solidFill>
                   <a:srgbClr val="000000"/>
                 </a:solidFill>
@@ -20939,7 +21677,7 @@
               <a:buChar char="•"/>
             </a:pPr>
             <a:r>
-              <a:rPr lang="en-US" sz="2400" b="1" dirty="0">
+              <a:rPr lang="en-US" sz="2400" b="1" u="sng" dirty="0">
                 <a:solidFill>
                   <a:srgbClr val="000000"/>
                 </a:solidFill>
